--- a/lesson_08-implementing_ui/lesson_08-implementing_ui.pptx
+++ b/lesson_08-implementing_ui/lesson_08-implementing_ui.pptx
@@ -222,7 +222,7 @@
           <a:p>
             <a:fld id="{81C4B3FE-0320-8142-8396-5C3025C019EC}" type="datetimeFigureOut">
               <a:rPr lang="en-IT" smtClean="0"/>
-              <a:t>2/11/26</a:t>
+              <a:t>2/19/26</a:t>
             </a:fld>
             <a:endParaRPr lang="en-IT"/>
           </a:p>
@@ -2651,7 +2651,7 @@
               <a:rPr lang="it-IT" sz="2800" dirty="0">
                 <a:latin typeface="Aptos" panose="020B0004020202020204" pitchFamily="34" charset="0"/>
               </a:rPr>
-              <a:t>A.Y. 2024-2025</a:t>
+              <a:t>A.Y. 2025-2026</a:t>
             </a:r>
           </a:p>
         </p:txBody>
@@ -4742,31 +4742,41 @@
             </a:pPr>
             <a:r>
               <a:rPr lang="en-GB" dirty="0">
-                <a:latin typeface="Courier" pitchFamily="2" charset="0"/>
+                <a:latin typeface="Menlo" panose="020B0609030804020204" pitchFamily="49" charset="0"/>
+                <a:ea typeface="Menlo" panose="020B0609030804020204" pitchFamily="49" charset="0"/>
+                <a:cs typeface="Menlo" panose="020B0609030804020204" pitchFamily="49" charset="0"/>
               </a:rPr>
               <a:t>Widget _example1() =&gt; Container(</a:t>
             </a:r>
             <a:r>
               <a:rPr lang="en-GB" dirty="0" err="1">
-                <a:latin typeface="Courier" pitchFamily="2" charset="0"/>
+                <a:latin typeface="Menlo" panose="020B0609030804020204" pitchFamily="49" charset="0"/>
+                <a:ea typeface="Menlo" panose="020B0609030804020204" pitchFamily="49" charset="0"/>
+                <a:cs typeface="Menlo" panose="020B0609030804020204" pitchFamily="49" charset="0"/>
               </a:rPr>
               <a:t>color</a:t>
             </a:r>
             <a:r>
               <a:rPr lang="en-GB" dirty="0">
-                <a:latin typeface="Courier" pitchFamily="2" charset="0"/>
+                <a:latin typeface="Menlo" panose="020B0609030804020204" pitchFamily="49" charset="0"/>
+                <a:ea typeface="Menlo" panose="020B0609030804020204" pitchFamily="49" charset="0"/>
+                <a:cs typeface="Menlo" panose="020B0609030804020204" pitchFamily="49" charset="0"/>
               </a:rPr>
               <a:t>: </a:t>
             </a:r>
             <a:r>
               <a:rPr lang="en-GB" dirty="0" err="1">
-                <a:latin typeface="Courier" pitchFamily="2" charset="0"/>
+                <a:latin typeface="Menlo" panose="020B0609030804020204" pitchFamily="49" charset="0"/>
+                <a:ea typeface="Menlo" panose="020B0609030804020204" pitchFamily="49" charset="0"/>
+                <a:cs typeface="Menlo" panose="020B0609030804020204" pitchFamily="49" charset="0"/>
               </a:rPr>
               <a:t>Colors.red</a:t>
             </a:r>
             <a:r>
               <a:rPr lang="en-GB" dirty="0">
-                <a:latin typeface="Courier" pitchFamily="2" charset="0"/>
+                <a:latin typeface="Menlo" panose="020B0609030804020204" pitchFamily="49" charset="0"/>
+                <a:ea typeface="Menlo" panose="020B0609030804020204" pitchFamily="49" charset="0"/>
+                <a:cs typeface="Menlo" panose="020B0609030804020204" pitchFamily="49" charset="0"/>
               </a:rPr>
               <a:t>);</a:t>
             </a:r>
@@ -4792,9 +4802,17 @@
             </a:r>
             <a:r>
               <a:rPr lang="en-GB" dirty="0">
+                <a:latin typeface="Menlo" panose="020B0609030804020204" pitchFamily="49" charset="0"/>
+                <a:ea typeface="Menlo" panose="020B0609030804020204" pitchFamily="49" charset="0"/>
+                <a:cs typeface="Menlo" panose="020B0609030804020204" pitchFamily="49" charset="0"/>
+              </a:rPr>
+              <a:t>Container</a:t>
+            </a:r>
+            <a:r>
+              <a:rPr lang="en-GB" dirty="0">
                 <a:latin typeface="Courier" pitchFamily="2" charset="0"/>
               </a:rPr>
-              <a:t>Container </a:t>
+              <a:t> </a:t>
             </a:r>
             <a:r>
               <a:rPr lang="en-GB" dirty="0">
@@ -4812,7 +4830,9 @@
             </a:r>
             <a:r>
               <a:rPr lang="en-GB" dirty="0">
-                <a:latin typeface="Courier" pitchFamily="2" charset="0"/>
+                <a:latin typeface="Menlo" panose="020B0609030804020204" pitchFamily="49" charset="0"/>
+                <a:ea typeface="Menlo" panose="020B0609030804020204" pitchFamily="49" charset="0"/>
+                <a:cs typeface="Menlo" panose="020B0609030804020204" pitchFamily="49" charset="0"/>
               </a:rPr>
               <a:t>Container</a:t>
             </a:r>
@@ -5380,23 +5400,28 @@
             </a:pPr>
             <a:r>
               <a:rPr lang="en-GB" dirty="0">
-                <a:latin typeface="Courier" pitchFamily="2" charset="0"/>
+                <a:latin typeface="Menlo" panose="020B0609030804020204" pitchFamily="49" charset="0"/>
+                <a:ea typeface="Menlo" panose="020B0609030804020204" pitchFamily="49" charset="0"/>
+                <a:cs typeface="Menlo" panose="020B0609030804020204" pitchFamily="49" charset="0"/>
               </a:rPr>
               <a:t>Widget _example2() =&gt; Container(width: 100, height: 100, </a:t>
             </a:r>
             <a:r>
               <a:rPr lang="en-GB" dirty="0" err="1">
-                <a:latin typeface="Courier" pitchFamily="2" charset="0"/>
+                <a:latin typeface="Menlo" panose="020B0609030804020204" pitchFamily="49" charset="0"/>
+                <a:ea typeface="Menlo" panose="020B0609030804020204" pitchFamily="49" charset="0"/>
+                <a:cs typeface="Menlo" panose="020B0609030804020204" pitchFamily="49" charset="0"/>
               </a:rPr>
               <a:t>color</a:t>
             </a:r>
             <a:r>
               <a:rPr lang="en-GB" dirty="0">
-                <a:latin typeface="Courier" pitchFamily="2" charset="0"/>
+                <a:latin typeface="Menlo" panose="020B0609030804020204" pitchFamily="49" charset="0"/>
+                <a:ea typeface="Menlo" panose="020B0609030804020204" pitchFamily="49" charset="0"/>
+                <a:cs typeface="Menlo" panose="020B0609030804020204" pitchFamily="49" charset="0"/>
               </a:rPr>
               <a:t>: red);</a:t>
             </a:r>
-            <a:endParaRPr lang="en-GB" dirty="0"/>
           </a:p>
           <a:p>
             <a:pPr marL="0" indent="0">
@@ -5413,8 +5438,9 @@
             </a:r>
             <a:r>
               <a:rPr lang="en-GB" dirty="0">
-                <a:latin typeface="Courier New" panose="02070309020205020404" pitchFamily="49" charset="0"/>
-                <a:cs typeface="Courier New" panose="02070309020205020404" pitchFamily="49" charset="0"/>
+                <a:latin typeface="Menlo" panose="020B0609030804020204" pitchFamily="49" charset="0"/>
+                <a:ea typeface="Menlo" panose="020B0609030804020204" pitchFamily="49" charset="0"/>
+                <a:cs typeface="Menlo" panose="020B0609030804020204" pitchFamily="49" charset="0"/>
               </a:rPr>
               <a:t>Container</a:t>
             </a:r>
@@ -5439,8 +5465,9 @@
             </a:r>
             <a:r>
               <a:rPr lang="en-GB" dirty="0">
-                <a:latin typeface="Courier New" panose="02070309020205020404" pitchFamily="49" charset="0"/>
-                <a:cs typeface="Courier New" panose="02070309020205020404" pitchFamily="49" charset="0"/>
+                <a:latin typeface="Menlo" panose="020B0609030804020204" pitchFamily="49" charset="0"/>
+                <a:ea typeface="Menlo" panose="020B0609030804020204" pitchFamily="49" charset="0"/>
+                <a:cs typeface="Menlo" panose="020B0609030804020204" pitchFamily="49" charset="0"/>
               </a:rPr>
               <a:t>Container</a:t>
             </a:r>
@@ -5997,19 +6024,25 @@
             </a:pPr>
             <a:r>
               <a:rPr lang="en-GB" dirty="0">
-                <a:latin typeface="Courier" pitchFamily="2" charset="0"/>
+                <a:latin typeface="Menlo" panose="020B0609030804020204" pitchFamily="49" charset="0"/>
+                <a:ea typeface="Menlo" panose="020B0609030804020204" pitchFamily="49" charset="0"/>
+                <a:cs typeface="Menlo" panose="020B0609030804020204" pitchFamily="49" charset="0"/>
               </a:rPr>
               <a:t>Widget _example3() =&gt; </a:t>
             </a:r>
             <a:r>
               <a:rPr lang="en-GB" dirty="0" err="1">
-                <a:latin typeface="Courier" pitchFamily="2" charset="0"/>
+                <a:latin typeface="Menlo" panose="020B0609030804020204" pitchFamily="49" charset="0"/>
+                <a:ea typeface="Menlo" panose="020B0609030804020204" pitchFamily="49" charset="0"/>
+                <a:cs typeface="Menlo" panose="020B0609030804020204" pitchFamily="49" charset="0"/>
               </a:rPr>
               <a:t>Center</a:t>
             </a:r>
             <a:r>
               <a:rPr lang="en-GB" dirty="0">
-                <a:latin typeface="Courier" pitchFamily="2" charset="0"/>
+                <a:latin typeface="Menlo" panose="020B0609030804020204" pitchFamily="49" charset="0"/>
+                <a:ea typeface="Menlo" panose="020B0609030804020204" pitchFamily="49" charset="0"/>
+                <a:cs typeface="Menlo" panose="020B0609030804020204" pitchFamily="49" charset="0"/>
               </a:rPr>
               <a:t>(</a:t>
             </a:r>
@@ -6020,19 +6053,25 @@
             </a:pPr>
             <a:r>
               <a:rPr lang="en-GB" dirty="0">
-                <a:latin typeface="Courier" pitchFamily="2" charset="0"/>
+                <a:latin typeface="Menlo" panose="020B0609030804020204" pitchFamily="49" charset="0"/>
+                <a:ea typeface="Menlo" panose="020B0609030804020204" pitchFamily="49" charset="0"/>
+                <a:cs typeface="Menlo" panose="020B0609030804020204" pitchFamily="49" charset="0"/>
               </a:rPr>
               <a:t>  child: Container(width: 100, height: 100, </a:t>
             </a:r>
             <a:r>
               <a:rPr lang="en-GB" dirty="0" err="1">
-                <a:latin typeface="Courier" pitchFamily="2" charset="0"/>
+                <a:latin typeface="Menlo" panose="020B0609030804020204" pitchFamily="49" charset="0"/>
+                <a:ea typeface="Menlo" panose="020B0609030804020204" pitchFamily="49" charset="0"/>
+                <a:cs typeface="Menlo" panose="020B0609030804020204" pitchFamily="49" charset="0"/>
               </a:rPr>
               <a:t>color</a:t>
             </a:r>
             <a:r>
               <a:rPr lang="en-GB" dirty="0">
-                <a:latin typeface="Courier" pitchFamily="2" charset="0"/>
+                <a:latin typeface="Menlo" panose="020B0609030804020204" pitchFamily="49" charset="0"/>
+                <a:ea typeface="Menlo" panose="020B0609030804020204" pitchFamily="49" charset="0"/>
+                <a:cs typeface="Menlo" panose="020B0609030804020204" pitchFamily="49" charset="0"/>
               </a:rPr>
               <a:t>: red),</a:t>
             </a:r>
@@ -6043,7 +6082,9 @@
             </a:pPr>
             <a:r>
               <a:rPr lang="en-GB" dirty="0">
-                <a:latin typeface="Courier" pitchFamily="2" charset="0"/>
+                <a:latin typeface="Menlo" panose="020B0609030804020204" pitchFamily="49" charset="0"/>
+                <a:ea typeface="Menlo" panose="020B0609030804020204" pitchFamily="49" charset="0"/>
+                <a:cs typeface="Menlo" panose="020B0609030804020204" pitchFamily="49" charset="0"/>
               </a:rPr>
               <a:t>);</a:t>
             </a:r>
@@ -6063,8 +6104,9 @@
             </a:r>
             <a:r>
               <a:rPr lang="en-GB" dirty="0" err="1">
-                <a:latin typeface="Courier New" panose="02070309020205020404" pitchFamily="49" charset="0"/>
-                <a:cs typeface="Courier New" panose="02070309020205020404" pitchFamily="49" charset="0"/>
+                <a:latin typeface="Menlo" panose="020B0609030804020204" pitchFamily="49" charset="0"/>
+                <a:ea typeface="Menlo" panose="020B0609030804020204" pitchFamily="49" charset="0"/>
+                <a:cs typeface="Menlo" panose="020B0609030804020204" pitchFamily="49" charset="0"/>
               </a:rPr>
               <a:t>Center</a:t>
             </a:r>
@@ -6083,8 +6125,9 @@
             </a:r>
             <a:r>
               <a:rPr lang="en-GB" dirty="0" err="1">
-                <a:latin typeface="Courier New" panose="02070309020205020404" pitchFamily="49" charset="0"/>
-                <a:cs typeface="Courier New" panose="02070309020205020404" pitchFamily="49" charset="0"/>
+                <a:latin typeface="Menlo" panose="020B0609030804020204" pitchFamily="49" charset="0"/>
+                <a:ea typeface="Menlo" panose="020B0609030804020204" pitchFamily="49" charset="0"/>
+                <a:cs typeface="Menlo" panose="020B0609030804020204" pitchFamily="49" charset="0"/>
               </a:rPr>
               <a:t>Center</a:t>
             </a:r>
@@ -6104,8 +6147,9 @@
             </a:r>
             <a:r>
               <a:rPr lang="en-GB" dirty="0" err="1">
-                <a:latin typeface="Courier New" panose="02070309020205020404" pitchFamily="49" charset="0"/>
-                <a:cs typeface="Courier New" panose="02070309020205020404" pitchFamily="49" charset="0"/>
+                <a:latin typeface="Menlo" panose="020B0609030804020204" pitchFamily="49" charset="0"/>
+                <a:ea typeface="Menlo" panose="020B0609030804020204" pitchFamily="49" charset="0"/>
+                <a:cs typeface="Menlo" panose="020B0609030804020204" pitchFamily="49" charset="0"/>
               </a:rPr>
               <a:t>Center</a:t>
             </a:r>
@@ -6117,8 +6161,9 @@
             </a:r>
             <a:r>
               <a:rPr lang="en-GB" dirty="0">
-                <a:latin typeface="Courier New" panose="02070309020205020404" pitchFamily="49" charset="0"/>
-                <a:cs typeface="Courier New" panose="02070309020205020404" pitchFamily="49" charset="0"/>
+                <a:latin typeface="Menlo" panose="020B0609030804020204" pitchFamily="49" charset="0"/>
+                <a:ea typeface="Menlo" panose="020B0609030804020204" pitchFamily="49" charset="0"/>
+                <a:cs typeface="Menlo" panose="020B0609030804020204" pitchFamily="49" charset="0"/>
               </a:rPr>
               <a:t>Container</a:t>
             </a:r>
@@ -6130,8 +6175,9 @@
             </a:r>
             <a:r>
               <a:rPr lang="en-GB" dirty="0">
-                <a:latin typeface="Courier New" panose="02070309020205020404" pitchFamily="49" charset="0"/>
-                <a:cs typeface="Courier New" panose="02070309020205020404" pitchFamily="49" charset="0"/>
+                <a:latin typeface="Menlo" panose="020B0609030804020204" pitchFamily="49" charset="0"/>
+                <a:ea typeface="Menlo" panose="020B0609030804020204" pitchFamily="49" charset="0"/>
+                <a:cs typeface="Menlo" panose="020B0609030804020204" pitchFamily="49" charset="0"/>
               </a:rPr>
               <a:t>Container</a:t>
             </a:r>
@@ -6688,19 +6734,25 @@
             </a:pPr>
             <a:r>
               <a:rPr lang="en-GB" dirty="0">
-                <a:latin typeface="Courier" pitchFamily="2" charset="0"/>
+                <a:latin typeface="Menlo" panose="020B0609030804020204" pitchFamily="49" charset="0"/>
+                <a:ea typeface="Menlo" panose="020B0609030804020204" pitchFamily="49" charset="0"/>
+                <a:cs typeface="Menlo" panose="020B0609030804020204" pitchFamily="49" charset="0"/>
               </a:rPr>
               <a:t>Widget _example6() =&gt; </a:t>
             </a:r>
             <a:r>
               <a:rPr lang="en-GB" dirty="0" err="1">
-                <a:latin typeface="Courier" pitchFamily="2" charset="0"/>
+                <a:latin typeface="Menlo" panose="020B0609030804020204" pitchFamily="49" charset="0"/>
+                <a:ea typeface="Menlo" panose="020B0609030804020204" pitchFamily="49" charset="0"/>
+                <a:cs typeface="Menlo" panose="020B0609030804020204" pitchFamily="49" charset="0"/>
               </a:rPr>
               <a:t>Center</a:t>
             </a:r>
             <a:r>
               <a:rPr lang="en-GB" dirty="0">
-                <a:latin typeface="Courier" pitchFamily="2" charset="0"/>
+                <a:latin typeface="Menlo" panose="020B0609030804020204" pitchFamily="49" charset="0"/>
+                <a:ea typeface="Menlo" panose="020B0609030804020204" pitchFamily="49" charset="0"/>
+                <a:cs typeface="Menlo" panose="020B0609030804020204" pitchFamily="49" charset="0"/>
               </a:rPr>
               <a:t>(</a:t>
             </a:r>
@@ -6711,19 +6763,25 @@
             </a:pPr>
             <a:r>
               <a:rPr lang="en-GB" dirty="0">
-                <a:latin typeface="Courier" pitchFamily="2" charset="0"/>
+                <a:latin typeface="Menlo" panose="020B0609030804020204" pitchFamily="49" charset="0"/>
+                <a:ea typeface="Menlo" panose="020B0609030804020204" pitchFamily="49" charset="0"/>
+                <a:cs typeface="Menlo" panose="020B0609030804020204" pitchFamily="49" charset="0"/>
               </a:rPr>
               <a:t>  child: Container(</a:t>
             </a:r>
             <a:r>
               <a:rPr lang="en-GB" dirty="0" err="1">
-                <a:latin typeface="Courier" pitchFamily="2" charset="0"/>
+                <a:latin typeface="Menlo" panose="020B0609030804020204" pitchFamily="49" charset="0"/>
+                <a:ea typeface="Menlo" panose="020B0609030804020204" pitchFamily="49" charset="0"/>
+                <a:cs typeface="Menlo" panose="020B0609030804020204" pitchFamily="49" charset="0"/>
               </a:rPr>
               <a:t>color</a:t>
             </a:r>
             <a:r>
               <a:rPr lang="en-GB" dirty="0">
-                <a:latin typeface="Courier" pitchFamily="2" charset="0"/>
+                <a:latin typeface="Menlo" panose="020B0609030804020204" pitchFamily="49" charset="0"/>
+                <a:ea typeface="Menlo" panose="020B0609030804020204" pitchFamily="49" charset="0"/>
+                <a:cs typeface="Menlo" panose="020B0609030804020204" pitchFamily="49" charset="0"/>
               </a:rPr>
               <a:t>: red),</a:t>
             </a:r>
@@ -6734,7 +6792,9 @@
             </a:pPr>
             <a:r>
               <a:rPr lang="en-GB" dirty="0">
-                <a:latin typeface="Courier" pitchFamily="2" charset="0"/>
+                <a:latin typeface="Menlo" panose="020B0609030804020204" pitchFamily="49" charset="0"/>
+                <a:ea typeface="Menlo" panose="020B0609030804020204" pitchFamily="49" charset="0"/>
+                <a:cs typeface="Menlo" panose="020B0609030804020204" pitchFamily="49" charset="0"/>
               </a:rPr>
               <a:t>)</a:t>
             </a:r>
@@ -6754,8 +6814,9 @@
             </a:r>
             <a:r>
               <a:rPr lang="en-GB" dirty="0" err="1">
-                <a:latin typeface="Courier New" panose="02070309020205020404" pitchFamily="49" charset="0"/>
-                <a:cs typeface="Courier New" panose="02070309020205020404" pitchFamily="49" charset="0"/>
+                <a:latin typeface="Menlo" panose="020B0609030804020204" pitchFamily="49" charset="0"/>
+                <a:ea typeface="Menlo" panose="020B0609030804020204" pitchFamily="49" charset="0"/>
+                <a:cs typeface="Menlo" panose="020B0609030804020204" pitchFamily="49" charset="0"/>
               </a:rPr>
               <a:t>Center</a:t>
             </a:r>
@@ -6767,8 +6828,9 @@
             </a:r>
             <a:r>
               <a:rPr lang="en-GB" dirty="0" err="1">
-                <a:latin typeface="Courier New" panose="02070309020205020404" pitchFamily="49" charset="0"/>
-                <a:cs typeface="Courier New" panose="02070309020205020404" pitchFamily="49" charset="0"/>
+                <a:latin typeface="Menlo" panose="020B0609030804020204" pitchFamily="49" charset="0"/>
+                <a:ea typeface="Menlo" panose="020B0609030804020204" pitchFamily="49" charset="0"/>
+                <a:cs typeface="Menlo" panose="020B0609030804020204" pitchFamily="49" charset="0"/>
               </a:rPr>
               <a:t>Center</a:t>
             </a:r>
@@ -6788,8 +6850,9 @@
             </a:r>
             <a:r>
               <a:rPr lang="en-GB" dirty="0" err="1">
-                <a:latin typeface="Courier New" panose="02070309020205020404" pitchFamily="49" charset="0"/>
-                <a:cs typeface="Courier New" panose="02070309020205020404" pitchFamily="49" charset="0"/>
+                <a:latin typeface="Menlo" panose="020B0609030804020204" pitchFamily="49" charset="0"/>
+                <a:ea typeface="Menlo" panose="020B0609030804020204" pitchFamily="49" charset="0"/>
+                <a:cs typeface="Menlo" panose="020B0609030804020204" pitchFamily="49" charset="0"/>
               </a:rPr>
               <a:t>Center</a:t>
             </a:r>
@@ -6801,8 +6864,9 @@
             </a:r>
             <a:r>
               <a:rPr lang="en-GB" dirty="0">
-                <a:latin typeface="Courier New" panose="02070309020205020404" pitchFamily="49" charset="0"/>
-                <a:cs typeface="Courier New" panose="02070309020205020404" pitchFamily="49" charset="0"/>
+                <a:latin typeface="Menlo" panose="020B0609030804020204" pitchFamily="49" charset="0"/>
+                <a:ea typeface="Menlo" panose="020B0609030804020204" pitchFamily="49" charset="0"/>
+                <a:cs typeface="Menlo" panose="020B0609030804020204" pitchFamily="49" charset="0"/>
               </a:rPr>
               <a:t>Container</a:t>
             </a:r>
@@ -6814,8 +6878,9 @@
             </a:r>
             <a:r>
               <a:rPr lang="en-GB" dirty="0">
-                <a:latin typeface="Courier New" panose="02070309020205020404" pitchFamily="49" charset="0"/>
-                <a:cs typeface="Courier New" panose="02070309020205020404" pitchFamily="49" charset="0"/>
+                <a:latin typeface="Menlo" panose="020B0609030804020204" pitchFamily="49" charset="0"/>
+                <a:ea typeface="Menlo" panose="020B0609030804020204" pitchFamily="49" charset="0"/>
+                <a:cs typeface="Menlo" panose="020B0609030804020204" pitchFamily="49" charset="0"/>
               </a:rPr>
               <a:t>Container</a:t>
             </a:r>
@@ -7185,7 +7250,7 @@
         </p:spPr>
         <p:txBody>
           <a:bodyPr vert="horz" lIns="91440" tIns="45720" rIns="91440" bIns="45720" rtlCol="0">
-            <a:normAutofit fontScale="85000" lnSpcReduction="20000"/>
+            <a:normAutofit fontScale="70000" lnSpcReduction="20000"/>
           </a:bodyPr>
           <a:lstStyle>
             <a:lvl1pPr marL="342900" indent="-342900" algn="l" defTabSz="914400" rtl="0" eaLnBrk="1" latinLnBrk="0" hangingPunct="1">
@@ -7371,20 +7436,26 @@
               <a:buNone/>
             </a:pPr>
             <a:r>
-              <a:rPr lang="en-GB" dirty="0">
-                <a:latin typeface="Courier" pitchFamily="2" charset="0"/>
+              <a:rPr lang="en-GB" sz="2800" dirty="0">
+                <a:latin typeface="Menlo" panose="020B0609030804020204" pitchFamily="49" charset="0"/>
+                <a:ea typeface="Menlo" panose="020B0609030804020204" pitchFamily="49" charset="0"/>
+                <a:cs typeface="Menlo" panose="020B0609030804020204" pitchFamily="49" charset="0"/>
               </a:rPr>
               <a:t>Widget _example7() =&gt; </a:t>
             </a:r>
             <a:r>
-              <a:rPr lang="en-GB" dirty="0" err="1">
-                <a:latin typeface="Courier" pitchFamily="2" charset="0"/>
+              <a:rPr lang="en-GB" sz="2800" dirty="0" err="1">
+                <a:latin typeface="Menlo" panose="020B0609030804020204" pitchFamily="49" charset="0"/>
+                <a:ea typeface="Menlo" panose="020B0609030804020204" pitchFamily="49" charset="0"/>
+                <a:cs typeface="Menlo" panose="020B0609030804020204" pitchFamily="49" charset="0"/>
               </a:rPr>
               <a:t>Center</a:t>
             </a:r>
             <a:r>
-              <a:rPr lang="en-GB" dirty="0">
-                <a:latin typeface="Courier" pitchFamily="2" charset="0"/>
+              <a:rPr lang="en-GB" sz="2800" dirty="0">
+                <a:latin typeface="Menlo" panose="020B0609030804020204" pitchFamily="49" charset="0"/>
+                <a:ea typeface="Menlo" panose="020B0609030804020204" pitchFamily="49" charset="0"/>
+                <a:cs typeface="Menlo" panose="020B0609030804020204" pitchFamily="49" charset="0"/>
               </a:rPr>
               <a:t>(</a:t>
             </a:r>
@@ -7394,8 +7465,10 @@
               <a:buNone/>
             </a:pPr>
             <a:r>
-              <a:rPr lang="en-GB" dirty="0">
-                <a:latin typeface="Courier" pitchFamily="2" charset="0"/>
+              <a:rPr lang="en-GB" sz="2800" dirty="0">
+                <a:latin typeface="Menlo" panose="020B0609030804020204" pitchFamily="49" charset="0"/>
+                <a:ea typeface="Menlo" panose="020B0609030804020204" pitchFamily="49" charset="0"/>
+                <a:cs typeface="Menlo" panose="020B0609030804020204" pitchFamily="49" charset="0"/>
               </a:rPr>
               <a:t>  child: Container(</a:t>
             </a:r>
@@ -7405,20 +7478,26 @@
               <a:buNone/>
             </a:pPr>
             <a:r>
-              <a:rPr lang="en-GB" dirty="0">
-                <a:latin typeface="Courier" pitchFamily="2" charset="0"/>
+              <a:rPr lang="en-GB" sz="2800" dirty="0">
+                <a:latin typeface="Menlo" panose="020B0609030804020204" pitchFamily="49" charset="0"/>
+                <a:ea typeface="Menlo" panose="020B0609030804020204" pitchFamily="49" charset="0"/>
+                <a:cs typeface="Menlo" panose="020B0609030804020204" pitchFamily="49" charset="0"/>
               </a:rPr>
               <a:t>    </a:t>
             </a:r>
             <a:r>
-              <a:rPr lang="en-GB" dirty="0" err="1">
-                <a:latin typeface="Courier" pitchFamily="2" charset="0"/>
+              <a:rPr lang="en-GB" sz="2800" dirty="0" err="1">
+                <a:latin typeface="Menlo" panose="020B0609030804020204" pitchFamily="49" charset="0"/>
+                <a:ea typeface="Menlo" panose="020B0609030804020204" pitchFamily="49" charset="0"/>
+                <a:cs typeface="Menlo" panose="020B0609030804020204" pitchFamily="49" charset="0"/>
               </a:rPr>
               <a:t>color</a:t>
             </a:r>
             <a:r>
-              <a:rPr lang="en-GB" dirty="0">
-                <a:latin typeface="Courier" pitchFamily="2" charset="0"/>
+              <a:rPr lang="en-GB" sz="2800" dirty="0">
+                <a:latin typeface="Menlo" panose="020B0609030804020204" pitchFamily="49" charset="0"/>
+                <a:ea typeface="Menlo" panose="020B0609030804020204" pitchFamily="49" charset="0"/>
+                <a:cs typeface="Menlo" panose="020B0609030804020204" pitchFamily="49" charset="0"/>
               </a:rPr>
               <a:t>: red,</a:t>
             </a:r>
@@ -7428,20 +7507,26 @@
               <a:buNone/>
             </a:pPr>
             <a:r>
-              <a:rPr lang="en-GB" dirty="0">
-                <a:latin typeface="Courier" pitchFamily="2" charset="0"/>
+              <a:rPr lang="en-GB" sz="2800" dirty="0">
+                <a:latin typeface="Menlo" panose="020B0609030804020204" pitchFamily="49" charset="0"/>
+                <a:ea typeface="Menlo" panose="020B0609030804020204" pitchFamily="49" charset="0"/>
+                <a:cs typeface="Menlo" panose="020B0609030804020204" pitchFamily="49" charset="0"/>
               </a:rPr>
               <a:t>    child: Container(</a:t>
             </a:r>
             <a:r>
-              <a:rPr lang="en-GB" dirty="0" err="1">
-                <a:latin typeface="Courier" pitchFamily="2" charset="0"/>
+              <a:rPr lang="en-GB" sz="2800" dirty="0" err="1">
+                <a:latin typeface="Menlo" panose="020B0609030804020204" pitchFamily="49" charset="0"/>
+                <a:ea typeface="Menlo" panose="020B0609030804020204" pitchFamily="49" charset="0"/>
+                <a:cs typeface="Menlo" panose="020B0609030804020204" pitchFamily="49" charset="0"/>
               </a:rPr>
               <a:t>color</a:t>
             </a:r>
             <a:r>
-              <a:rPr lang="en-GB" dirty="0">
-                <a:latin typeface="Courier" pitchFamily="2" charset="0"/>
+              <a:rPr lang="en-GB" sz="2800" dirty="0">
+                <a:latin typeface="Menlo" panose="020B0609030804020204" pitchFamily="49" charset="0"/>
+                <a:ea typeface="Menlo" panose="020B0609030804020204" pitchFamily="49" charset="0"/>
+                <a:cs typeface="Menlo" panose="020B0609030804020204" pitchFamily="49" charset="0"/>
               </a:rPr>
               <a:t>: green, width: 30, height: 30),</a:t>
             </a:r>
@@ -7451,8 +7536,10 @@
               <a:buNone/>
             </a:pPr>
             <a:r>
-              <a:rPr lang="en-GB" dirty="0">
-                <a:latin typeface="Courier" pitchFamily="2" charset="0"/>
+              <a:rPr lang="en-GB" sz="2800" dirty="0">
+                <a:latin typeface="Menlo" panose="020B0609030804020204" pitchFamily="49" charset="0"/>
+                <a:ea typeface="Menlo" panose="020B0609030804020204" pitchFamily="49" charset="0"/>
+                <a:cs typeface="Menlo" panose="020B0609030804020204" pitchFamily="49" charset="0"/>
               </a:rPr>
               <a:t>  ),</a:t>
             </a:r>
@@ -7462,8 +7549,10 @@
               <a:buNone/>
             </a:pPr>
             <a:r>
-              <a:rPr lang="en-GB" dirty="0">
-                <a:latin typeface="Courier" pitchFamily="2" charset="0"/>
+              <a:rPr lang="en-GB" sz="2800" dirty="0">
+                <a:latin typeface="Menlo" panose="020B0609030804020204" pitchFamily="49" charset="0"/>
+                <a:ea typeface="Menlo" panose="020B0609030804020204" pitchFamily="49" charset="0"/>
+                <a:cs typeface="Menlo" panose="020B0609030804020204" pitchFamily="49" charset="0"/>
               </a:rPr>
               <a:t>);</a:t>
             </a:r>
@@ -7482,9 +7571,10 @@
               <a:t>The screen forces the </a:t>
             </a:r>
             <a:r>
-              <a:rPr lang="en-GB" dirty="0" err="1">
-                <a:latin typeface="Courier New" panose="02070309020205020404" pitchFamily="49" charset="0"/>
-                <a:cs typeface="Courier New" panose="02070309020205020404" pitchFamily="49" charset="0"/>
+              <a:rPr lang="en-GB" sz="2800" dirty="0" err="1">
+                <a:latin typeface="Menlo" panose="020B0609030804020204" pitchFamily="49" charset="0"/>
+                <a:ea typeface="Menlo" panose="020B0609030804020204" pitchFamily="49" charset="0"/>
+                <a:cs typeface="Menlo" panose="020B0609030804020204" pitchFamily="49" charset="0"/>
               </a:rPr>
               <a:t>Center</a:t>
             </a:r>
@@ -7495,9 +7585,10 @@
               <a:t> to be exactly the same size as the screen, so the </a:t>
             </a:r>
             <a:r>
-              <a:rPr lang="en-GB" dirty="0" err="1">
-                <a:latin typeface="Courier New" panose="02070309020205020404" pitchFamily="49" charset="0"/>
-                <a:cs typeface="Courier New" panose="02070309020205020404" pitchFamily="49" charset="0"/>
+              <a:rPr lang="en-GB" sz="2800" dirty="0" err="1">
+                <a:latin typeface="Menlo" panose="020B0609030804020204" pitchFamily="49" charset="0"/>
+                <a:ea typeface="Menlo" panose="020B0609030804020204" pitchFamily="49" charset="0"/>
+                <a:cs typeface="Menlo" panose="020B0609030804020204" pitchFamily="49" charset="0"/>
               </a:rPr>
               <a:t>Center</a:t>
             </a:r>
@@ -7516,9 +7607,10 @@
               <a:t>The </a:t>
             </a:r>
             <a:r>
-              <a:rPr lang="en-GB" dirty="0" err="1">
-                <a:latin typeface="Courier New" panose="02070309020205020404" pitchFamily="49" charset="0"/>
-                <a:cs typeface="Courier New" panose="02070309020205020404" pitchFamily="49" charset="0"/>
+              <a:rPr lang="en-GB" sz="2800" dirty="0" err="1">
+                <a:latin typeface="Menlo" panose="020B0609030804020204" pitchFamily="49" charset="0"/>
+                <a:ea typeface="Menlo" panose="020B0609030804020204" pitchFamily="49" charset="0"/>
+                <a:cs typeface="Menlo" panose="020B0609030804020204" pitchFamily="49" charset="0"/>
               </a:rPr>
               <a:t>Center</a:t>
             </a:r>
@@ -7529,9 +7621,10 @@
               <a:t> tells the red </a:t>
             </a:r>
             <a:r>
-              <a:rPr lang="en-GB" dirty="0">
-                <a:latin typeface="Courier New" panose="02070309020205020404" pitchFamily="49" charset="0"/>
-                <a:cs typeface="Courier New" panose="02070309020205020404" pitchFamily="49" charset="0"/>
+              <a:rPr lang="en-GB" sz="2800" dirty="0">
+                <a:latin typeface="Menlo" panose="020B0609030804020204" pitchFamily="49" charset="0"/>
+                <a:ea typeface="Menlo" panose="020B0609030804020204" pitchFamily="49" charset="0"/>
+                <a:cs typeface="Menlo" panose="020B0609030804020204" pitchFamily="49" charset="0"/>
               </a:rPr>
               <a:t>Container</a:t>
             </a:r>
@@ -7542,9 +7635,10 @@
               <a:t> that it can be any size it wants, but not bigger than the screen. Since the red </a:t>
             </a:r>
             <a:r>
-              <a:rPr lang="en-GB" dirty="0">
-                <a:latin typeface="Courier New" panose="02070309020205020404" pitchFamily="49" charset="0"/>
-                <a:cs typeface="Courier New" panose="02070309020205020404" pitchFamily="49" charset="0"/>
+              <a:rPr lang="en-GB" sz="2800" dirty="0">
+                <a:latin typeface="Menlo" panose="020B0609030804020204" pitchFamily="49" charset="0"/>
+                <a:ea typeface="Menlo" panose="020B0609030804020204" pitchFamily="49" charset="0"/>
+                <a:cs typeface="Menlo" panose="020B0609030804020204" pitchFamily="49" charset="0"/>
               </a:rPr>
               <a:t>Container</a:t>
             </a:r>
@@ -7563,9 +7657,10 @@
               <a:t>The red </a:t>
             </a:r>
             <a:r>
-              <a:rPr lang="en-GB" dirty="0">
-                <a:latin typeface="Courier New" panose="02070309020205020404" pitchFamily="49" charset="0"/>
-                <a:cs typeface="Courier New" panose="02070309020205020404" pitchFamily="49" charset="0"/>
+              <a:rPr lang="en-GB" sz="2900" dirty="0">
+                <a:latin typeface="Menlo" panose="020B0609030804020204" pitchFamily="49" charset="0"/>
+                <a:ea typeface="Menlo" panose="020B0609030804020204" pitchFamily="49" charset="0"/>
+                <a:cs typeface="Menlo" panose="020B0609030804020204" pitchFamily="49" charset="0"/>
               </a:rPr>
               <a:t>Container</a:t>
             </a:r>
@@ -7584,9 +7679,10 @@
               <a:t>The child is a green </a:t>
             </a:r>
             <a:r>
-              <a:rPr lang="en-GB" dirty="0">
-                <a:latin typeface="Courier New" panose="02070309020205020404" pitchFamily="49" charset="0"/>
-                <a:cs typeface="Courier New" panose="02070309020205020404" pitchFamily="49" charset="0"/>
+              <a:rPr lang="en-GB" sz="2900" dirty="0">
+                <a:latin typeface="Menlo" panose="020B0609030804020204" pitchFamily="49" charset="0"/>
+                <a:ea typeface="Menlo" panose="020B0609030804020204" pitchFamily="49" charset="0"/>
+                <a:cs typeface="Menlo" panose="020B0609030804020204" pitchFamily="49" charset="0"/>
               </a:rPr>
               <a:t>Container</a:t>
             </a:r>
@@ -7597,9 +7693,10 @@
               <a:t> that wants to be 30 × 30. Given that the red </a:t>
             </a:r>
             <a:r>
-              <a:rPr lang="en-GB" dirty="0">
-                <a:latin typeface="Courier New" panose="02070309020205020404" pitchFamily="49" charset="0"/>
-                <a:cs typeface="Courier New" panose="02070309020205020404" pitchFamily="49" charset="0"/>
+              <a:rPr lang="en-GB" sz="2900" dirty="0">
+                <a:latin typeface="Menlo" panose="020B0609030804020204" pitchFamily="49" charset="0"/>
+                <a:ea typeface="Menlo" panose="020B0609030804020204" pitchFamily="49" charset="0"/>
+                <a:cs typeface="Menlo" panose="020B0609030804020204" pitchFamily="49" charset="0"/>
               </a:rPr>
               <a:t>Container</a:t>
             </a:r>
@@ -7622,9 +7719,10 @@
               <a:t> isn’t visible because the green </a:t>
             </a:r>
             <a:r>
-              <a:rPr lang="en-GB" dirty="0">
-                <a:latin typeface="Courier New" panose="02070309020205020404" pitchFamily="49" charset="0"/>
-                <a:cs typeface="Courier New" panose="02070309020205020404" pitchFamily="49" charset="0"/>
+              <a:rPr lang="en-GB" sz="2900" dirty="0">
+                <a:latin typeface="Menlo" panose="020B0609030804020204" pitchFamily="49" charset="0"/>
+                <a:ea typeface="Menlo" panose="020B0609030804020204" pitchFamily="49" charset="0"/>
+                <a:cs typeface="Menlo" panose="020B0609030804020204" pitchFamily="49" charset="0"/>
               </a:rPr>
               <a:t>Container</a:t>
             </a:r>
@@ -7635,9 +7733,10 @@
               <a:t> entirely covers the red </a:t>
             </a:r>
             <a:r>
-              <a:rPr lang="en-GB" dirty="0">
-                <a:latin typeface="Courier New" panose="02070309020205020404" pitchFamily="49" charset="0"/>
-                <a:cs typeface="Courier New" panose="02070309020205020404" pitchFamily="49" charset="0"/>
+              <a:rPr lang="en-GB" sz="2800" dirty="0">
+                <a:latin typeface="Menlo" panose="020B0609030804020204" pitchFamily="49" charset="0"/>
+                <a:ea typeface="Menlo" panose="020B0609030804020204" pitchFamily="49" charset="0"/>
+                <a:cs typeface="Menlo" panose="020B0609030804020204" pitchFamily="49" charset="0"/>
               </a:rPr>
               <a:t>Container</a:t>
             </a:r>
@@ -8197,19 +8296,25 @@
             </a:pPr>
             <a:r>
               <a:rPr lang="en-GB" dirty="0">
-                <a:latin typeface="Courier" pitchFamily="2" charset="0"/>
+                <a:latin typeface="Menlo" panose="020B0609030804020204" pitchFamily="49" charset="0"/>
+                <a:ea typeface="Menlo" panose="020B0609030804020204" pitchFamily="49" charset="0"/>
+                <a:cs typeface="Menlo" panose="020B0609030804020204" pitchFamily="49" charset="0"/>
               </a:rPr>
               <a:t>Widget _example14() =&gt; </a:t>
             </a:r>
             <a:r>
               <a:rPr lang="en-GB" dirty="0" err="1">
-                <a:latin typeface="Courier" pitchFamily="2" charset="0"/>
+                <a:latin typeface="Menlo" panose="020B0609030804020204" pitchFamily="49" charset="0"/>
+                <a:ea typeface="Menlo" panose="020B0609030804020204" pitchFamily="49" charset="0"/>
+                <a:cs typeface="Menlo" panose="020B0609030804020204" pitchFamily="49" charset="0"/>
               </a:rPr>
               <a:t>UnconstrainedBox</a:t>
             </a:r>
             <a:r>
               <a:rPr lang="en-GB" dirty="0">
-                <a:latin typeface="Courier" pitchFamily="2" charset="0"/>
+                <a:latin typeface="Menlo" panose="020B0609030804020204" pitchFamily="49" charset="0"/>
+                <a:ea typeface="Menlo" panose="020B0609030804020204" pitchFamily="49" charset="0"/>
+                <a:cs typeface="Menlo" panose="020B0609030804020204" pitchFamily="49" charset="0"/>
               </a:rPr>
               <a:t>(</a:t>
             </a:r>
@@ -8220,19 +8325,25 @@
             </a:pPr>
             <a:r>
               <a:rPr lang="en-GB" dirty="0">
-                <a:latin typeface="Courier" pitchFamily="2" charset="0"/>
+                <a:latin typeface="Menlo" panose="020B0609030804020204" pitchFamily="49" charset="0"/>
+                <a:ea typeface="Menlo" panose="020B0609030804020204" pitchFamily="49" charset="0"/>
+                <a:cs typeface="Menlo" panose="020B0609030804020204" pitchFamily="49" charset="0"/>
               </a:rPr>
               <a:t>  child: Container(</a:t>
             </a:r>
             <a:r>
               <a:rPr lang="en-GB" dirty="0" err="1">
-                <a:latin typeface="Courier" pitchFamily="2" charset="0"/>
+                <a:latin typeface="Menlo" panose="020B0609030804020204" pitchFamily="49" charset="0"/>
+                <a:ea typeface="Menlo" panose="020B0609030804020204" pitchFamily="49" charset="0"/>
+                <a:cs typeface="Menlo" panose="020B0609030804020204" pitchFamily="49" charset="0"/>
               </a:rPr>
               <a:t>color</a:t>
             </a:r>
             <a:r>
               <a:rPr lang="en-GB" dirty="0">
-                <a:latin typeface="Courier" pitchFamily="2" charset="0"/>
+                <a:latin typeface="Menlo" panose="020B0609030804020204" pitchFamily="49" charset="0"/>
+                <a:ea typeface="Menlo" panose="020B0609030804020204" pitchFamily="49" charset="0"/>
+                <a:cs typeface="Menlo" panose="020B0609030804020204" pitchFamily="49" charset="0"/>
               </a:rPr>
               <a:t>: red, width: 4000, height: 50),</a:t>
             </a:r>
@@ -8243,7 +8354,9 @@
             </a:pPr>
             <a:r>
               <a:rPr lang="en-GB" dirty="0">
-                <a:latin typeface="Courier" pitchFamily="2" charset="0"/>
+                <a:latin typeface="Menlo" panose="020B0609030804020204" pitchFamily="49" charset="0"/>
+                <a:ea typeface="Menlo" panose="020B0609030804020204" pitchFamily="49" charset="0"/>
+                <a:cs typeface="Menlo" panose="020B0609030804020204" pitchFamily="49" charset="0"/>
               </a:rPr>
               <a:t>);</a:t>
             </a:r>
@@ -8263,8 +8376,9 @@
             </a:r>
             <a:r>
               <a:rPr lang="en-GB" dirty="0" err="1">
-                <a:latin typeface="Courier New" panose="02070309020205020404" pitchFamily="49" charset="0"/>
-                <a:cs typeface="Courier New" panose="02070309020205020404" pitchFamily="49" charset="0"/>
+                <a:latin typeface="Menlo" panose="020B0609030804020204" pitchFamily="49" charset="0"/>
+                <a:ea typeface="Menlo" panose="020B0609030804020204" pitchFamily="49" charset="0"/>
+                <a:cs typeface="Menlo" panose="020B0609030804020204" pitchFamily="49" charset="0"/>
               </a:rPr>
               <a:t>UnconstrainedBox</a:t>
             </a:r>
@@ -8276,8 +8390,9 @@
             </a:r>
             <a:r>
               <a:rPr lang="en-GB" dirty="0" err="1">
-                <a:latin typeface="Courier New" panose="02070309020205020404" pitchFamily="49" charset="0"/>
-                <a:cs typeface="Courier New" panose="02070309020205020404" pitchFamily="49" charset="0"/>
+                <a:latin typeface="Menlo" panose="020B0609030804020204" pitchFamily="49" charset="0"/>
+                <a:ea typeface="Menlo" panose="020B0609030804020204" pitchFamily="49" charset="0"/>
+                <a:cs typeface="Menlo" panose="020B0609030804020204" pitchFamily="49" charset="0"/>
               </a:rPr>
               <a:t>UnconstrainedBox</a:t>
             </a:r>
@@ -8289,8 +8404,9 @@
             </a:r>
             <a:r>
               <a:rPr lang="en-GB" dirty="0">
-                <a:latin typeface="Courier New" panose="02070309020205020404" pitchFamily="49" charset="0"/>
-                <a:cs typeface="Courier New" panose="02070309020205020404" pitchFamily="49" charset="0"/>
+                <a:latin typeface="Menlo" panose="020B0609030804020204" pitchFamily="49" charset="0"/>
+                <a:ea typeface="Menlo" panose="020B0609030804020204" pitchFamily="49" charset="0"/>
+                <a:cs typeface="Menlo" panose="020B0609030804020204" pitchFamily="49" charset="0"/>
               </a:rPr>
               <a:t>Container</a:t>
             </a:r>
@@ -8310,8 +8426,9 @@
             </a:r>
             <a:r>
               <a:rPr lang="en-GB" dirty="0">
-                <a:latin typeface="Courier New" panose="02070309020205020404" pitchFamily="49" charset="0"/>
-                <a:cs typeface="Courier New" panose="02070309020205020404" pitchFamily="49" charset="0"/>
+                <a:latin typeface="Menlo" panose="020B0609030804020204" pitchFamily="49" charset="0"/>
+                <a:ea typeface="Menlo" panose="020B0609030804020204" pitchFamily="49" charset="0"/>
+                <a:cs typeface="Menlo" panose="020B0609030804020204" pitchFamily="49" charset="0"/>
               </a:rPr>
               <a:t>Container</a:t>
             </a:r>
@@ -8323,8 +8440,9 @@
             </a:r>
             <a:r>
               <a:rPr lang="en-GB" dirty="0" err="1">
-                <a:latin typeface="Courier New" panose="02070309020205020404" pitchFamily="49" charset="0"/>
-                <a:cs typeface="Courier New" panose="02070309020205020404" pitchFamily="49" charset="0"/>
+                <a:latin typeface="Menlo" panose="020B0609030804020204" pitchFamily="49" charset="0"/>
+                <a:ea typeface="Menlo" panose="020B0609030804020204" pitchFamily="49" charset="0"/>
+                <a:cs typeface="Menlo" panose="020B0609030804020204" pitchFamily="49" charset="0"/>
               </a:rPr>
               <a:t>UnconstrainedBox</a:t>
             </a:r>
@@ -8336,8 +8454,9 @@
             </a:r>
             <a:r>
               <a:rPr lang="en-GB" dirty="0" err="1">
-                <a:latin typeface="Courier New" panose="02070309020205020404" pitchFamily="49" charset="0"/>
-                <a:cs typeface="Courier New" panose="02070309020205020404" pitchFamily="49" charset="0"/>
+                <a:latin typeface="Menlo" panose="020B0609030804020204" pitchFamily="49" charset="0"/>
+                <a:ea typeface="Menlo" panose="020B0609030804020204" pitchFamily="49" charset="0"/>
+                <a:cs typeface="Menlo" panose="020B0609030804020204" pitchFamily="49" charset="0"/>
               </a:rPr>
               <a:t>UnconstrainedBox</a:t>
             </a:r>
@@ -8680,31 +8799,41 @@
             </a:pPr>
             <a:r>
               <a:rPr lang="en-GB" dirty="0">
-                <a:latin typeface="Courier" pitchFamily="2" charset="0"/>
+                <a:latin typeface="Menlo" panose="020B0609030804020204" pitchFamily="49" charset="0"/>
+                <a:ea typeface="Menlo" panose="020B0609030804020204" pitchFamily="49" charset="0"/>
+                <a:cs typeface="Menlo" panose="020B0609030804020204" pitchFamily="49" charset="0"/>
               </a:rPr>
               <a:t>Widget _example18() =&gt; </a:t>
             </a:r>
             <a:r>
               <a:rPr lang="en-GB" dirty="0" err="1">
-                <a:latin typeface="Courier" pitchFamily="2" charset="0"/>
+                <a:latin typeface="Menlo" panose="020B0609030804020204" pitchFamily="49" charset="0"/>
+                <a:ea typeface="Menlo" panose="020B0609030804020204" pitchFamily="49" charset="0"/>
+                <a:cs typeface="Menlo" panose="020B0609030804020204" pitchFamily="49" charset="0"/>
               </a:rPr>
               <a:t>const</a:t>
             </a:r>
             <a:r>
               <a:rPr lang="en-GB" dirty="0">
-                <a:latin typeface="Courier" pitchFamily="2" charset="0"/>
+                <a:latin typeface="Menlo" panose="020B0609030804020204" pitchFamily="49" charset="0"/>
+                <a:ea typeface="Menlo" panose="020B0609030804020204" pitchFamily="49" charset="0"/>
+                <a:cs typeface="Menlo" panose="020B0609030804020204" pitchFamily="49" charset="0"/>
               </a:rPr>
               <a:t> </a:t>
             </a:r>
             <a:r>
               <a:rPr lang="en-GB" dirty="0" err="1">
-                <a:latin typeface="Courier" pitchFamily="2" charset="0"/>
+                <a:latin typeface="Menlo" panose="020B0609030804020204" pitchFamily="49" charset="0"/>
+                <a:ea typeface="Menlo" panose="020B0609030804020204" pitchFamily="49" charset="0"/>
+                <a:cs typeface="Menlo" panose="020B0609030804020204" pitchFamily="49" charset="0"/>
               </a:rPr>
               <a:t>FittedBox</a:t>
             </a:r>
             <a:r>
               <a:rPr lang="en-GB" dirty="0">
-                <a:latin typeface="Courier" pitchFamily="2" charset="0"/>
+                <a:latin typeface="Menlo" panose="020B0609030804020204" pitchFamily="49" charset="0"/>
+                <a:ea typeface="Menlo" panose="020B0609030804020204" pitchFamily="49" charset="0"/>
+                <a:cs typeface="Menlo" panose="020B0609030804020204" pitchFamily="49" charset="0"/>
               </a:rPr>
               <a:t>(</a:t>
             </a:r>
@@ -8715,7 +8844,9 @@
             </a:pPr>
             <a:r>
               <a:rPr lang="en-GB" dirty="0">
-                <a:latin typeface="Courier" pitchFamily="2" charset="0"/>
+                <a:latin typeface="Menlo" panose="020B0609030804020204" pitchFamily="49" charset="0"/>
+                <a:ea typeface="Menlo" panose="020B0609030804020204" pitchFamily="49" charset="0"/>
+                <a:cs typeface="Menlo" panose="020B0609030804020204" pitchFamily="49" charset="0"/>
               </a:rPr>
               <a:t>  child: Text('Some Example Text.'),</a:t>
             </a:r>
@@ -8726,7 +8857,9 @@
             </a:pPr>
             <a:r>
               <a:rPr lang="en-GB" dirty="0">
-                <a:latin typeface="Courier" pitchFamily="2" charset="0"/>
+                <a:latin typeface="Menlo" panose="020B0609030804020204" pitchFamily="49" charset="0"/>
+                <a:ea typeface="Menlo" panose="020B0609030804020204" pitchFamily="49" charset="0"/>
+                <a:cs typeface="Menlo" panose="020B0609030804020204" pitchFamily="49" charset="0"/>
               </a:rPr>
               <a:t>);</a:t>
             </a:r>
@@ -8746,8 +8879,9 @@
             </a:r>
             <a:r>
               <a:rPr lang="en-GB" dirty="0" err="1">
-                <a:latin typeface="Courier New" panose="02070309020205020404" pitchFamily="49" charset="0"/>
-                <a:cs typeface="Courier New" panose="02070309020205020404" pitchFamily="49" charset="0"/>
+                <a:latin typeface="Menlo" panose="020B0609030804020204" pitchFamily="49" charset="0"/>
+                <a:ea typeface="Menlo" panose="020B0609030804020204" pitchFamily="49" charset="0"/>
+                <a:cs typeface="Menlo" panose="020B0609030804020204" pitchFamily="49" charset="0"/>
               </a:rPr>
               <a:t>FittedBox</a:t>
             </a:r>
@@ -8756,6 +8890,61 @@
                 <a:latin typeface="Aptos" panose="020B0004020202020204" pitchFamily="34" charset="0"/>
               </a:rPr>
               <a:t> to be exactly the same size as the screen. The </a:t>
+            </a:r>
+            <a:r>
+              <a:rPr lang="en-GB" dirty="0">
+                <a:latin typeface="Menlo" panose="020B0609030804020204" pitchFamily="49" charset="0"/>
+                <a:ea typeface="Menlo" panose="020B0609030804020204" pitchFamily="49" charset="0"/>
+                <a:cs typeface="Menlo" panose="020B0609030804020204" pitchFamily="49" charset="0"/>
+              </a:rPr>
+              <a:t>Text</a:t>
+            </a:r>
+            <a:r>
+              <a:rPr lang="en-GB" dirty="0">
+                <a:latin typeface="Aptos" panose="020B0004020202020204" pitchFamily="34" charset="0"/>
+              </a:rPr>
+              <a:t> has some natural width (also called its intrinsic width) that depends on the amount of text, its font size, and so on.</a:t>
+            </a:r>
+          </a:p>
+          <a:p>
+            <a:endParaRPr lang="en-GB" dirty="0">
+              <a:latin typeface="Aptos" panose="020B0004020202020204" pitchFamily="34" charset="0"/>
+            </a:endParaRPr>
+          </a:p>
+          <a:p>
+            <a:r>
+              <a:rPr lang="en-GB" dirty="0">
+                <a:latin typeface="Aptos" panose="020B0004020202020204" pitchFamily="34" charset="0"/>
+              </a:rPr>
+              <a:t>The </a:t>
+            </a:r>
+            <a:r>
+              <a:rPr lang="en-GB" dirty="0" err="1">
+                <a:latin typeface="Menlo" panose="020B0609030804020204" pitchFamily="49" charset="0"/>
+                <a:ea typeface="Menlo" panose="020B0609030804020204" pitchFamily="49" charset="0"/>
+                <a:cs typeface="Menlo" panose="020B0609030804020204" pitchFamily="49" charset="0"/>
+              </a:rPr>
+              <a:t>FittedBox</a:t>
+            </a:r>
+            <a:r>
+              <a:rPr lang="en-GB" dirty="0">
+                <a:latin typeface="Aptos" panose="020B0004020202020204" pitchFamily="34" charset="0"/>
+              </a:rPr>
+              <a:t> lets the </a:t>
+            </a:r>
+            <a:r>
+              <a:rPr lang="en-GB" dirty="0">
+                <a:latin typeface="Menlo" panose="020B0609030804020204" pitchFamily="49" charset="0"/>
+                <a:ea typeface="Menlo" panose="020B0609030804020204" pitchFamily="49" charset="0"/>
+                <a:cs typeface="Menlo" panose="020B0609030804020204" pitchFamily="49" charset="0"/>
+              </a:rPr>
+              <a:t>Text</a:t>
+            </a:r>
+            <a:r>
+              <a:rPr lang="en-GB" dirty="0">
+                <a:latin typeface="Aptos" panose="020B0004020202020204" pitchFamily="34" charset="0"/>
+              </a:rPr>
+              <a:t> be any size it wants, but after the </a:t>
             </a:r>
             <a:r>
               <a:rPr lang="en-GB" dirty="0">
@@ -8768,20 +8957,7 @@
               <a:rPr lang="en-GB" dirty="0">
                 <a:latin typeface="Aptos" panose="020B0004020202020204" pitchFamily="34" charset="0"/>
               </a:rPr>
-              <a:t> has some natural width (also called its intrinsic width) that depends on the amount of text, its font size, and so on.</a:t>
-            </a:r>
-          </a:p>
-          <a:p>
-            <a:endParaRPr lang="en-GB" dirty="0">
-              <a:latin typeface="Aptos" panose="020B0004020202020204" pitchFamily="34" charset="0"/>
-            </a:endParaRPr>
-          </a:p>
-          <a:p>
-            <a:r>
-              <a:rPr lang="en-GB" dirty="0">
-                <a:latin typeface="Aptos" panose="020B0004020202020204" pitchFamily="34" charset="0"/>
-              </a:rPr>
-              <a:t>The </a:t>
+              <a:t> tells its size to the </a:t>
             </a:r>
             <a:r>
               <a:rPr lang="en-GB" dirty="0" err="1">
@@ -8794,64 +8970,27 @@
               <a:rPr lang="en-GB" dirty="0">
                 <a:latin typeface="Aptos" panose="020B0004020202020204" pitchFamily="34" charset="0"/>
               </a:rPr>
-              <a:t> lets the </a:t>
-            </a:r>
-            <a:r>
-              <a:rPr lang="en-GB" dirty="0">
-                <a:latin typeface="Courier New" panose="02070309020205020404" pitchFamily="49" charset="0"/>
-                <a:cs typeface="Courier New" panose="02070309020205020404" pitchFamily="49" charset="0"/>
-              </a:rPr>
-              <a:t>Text</a:t>
+              <a:t>, the </a:t>
+            </a:r>
+            <a:r>
+              <a:rPr lang="en-GB" dirty="0" err="1">
+                <a:latin typeface="Menlo" panose="020B0609030804020204" pitchFamily="49" charset="0"/>
+                <a:ea typeface="Menlo" panose="020B0609030804020204" pitchFamily="49" charset="0"/>
+                <a:cs typeface="Menlo" panose="020B0609030804020204" pitchFamily="49" charset="0"/>
+              </a:rPr>
+              <a:t>FittedBox</a:t>
             </a:r>
             <a:r>
               <a:rPr lang="en-GB" dirty="0">
                 <a:latin typeface="Aptos" panose="020B0004020202020204" pitchFamily="34" charset="0"/>
               </a:rPr>
-              <a:t> be any size it wants, but after the </a:t>
+              <a:t> scales the </a:t>
             </a:r>
             <a:r>
               <a:rPr lang="en-GB" dirty="0">
-                <a:latin typeface="Courier New" panose="02070309020205020404" pitchFamily="49" charset="0"/>
-                <a:cs typeface="Courier New" panose="02070309020205020404" pitchFamily="49" charset="0"/>
-              </a:rPr>
-              <a:t>Text</a:t>
-            </a:r>
-            <a:r>
-              <a:rPr lang="en-GB" dirty="0">
-                <a:latin typeface="Aptos" panose="020B0004020202020204" pitchFamily="34" charset="0"/>
-              </a:rPr>
-              <a:t> tells its size to the </a:t>
-            </a:r>
-            <a:r>
-              <a:rPr lang="en-GB" dirty="0" err="1">
-                <a:latin typeface="Courier New" panose="02070309020205020404" pitchFamily="49" charset="0"/>
-                <a:cs typeface="Courier New" panose="02070309020205020404" pitchFamily="49" charset="0"/>
-              </a:rPr>
-              <a:t>FittedBox</a:t>
-            </a:r>
-            <a:r>
-              <a:rPr lang="en-GB" dirty="0">
-                <a:latin typeface="Aptos" panose="020B0004020202020204" pitchFamily="34" charset="0"/>
-              </a:rPr>
-              <a:t>, the </a:t>
-            </a:r>
-            <a:r>
-              <a:rPr lang="en-GB" dirty="0" err="1">
-                <a:latin typeface="Courier New" panose="02070309020205020404" pitchFamily="49" charset="0"/>
-                <a:cs typeface="Courier New" panose="02070309020205020404" pitchFamily="49" charset="0"/>
-              </a:rPr>
-              <a:t>FittedBox</a:t>
-            </a:r>
-            <a:r>
-              <a:rPr lang="en-GB" dirty="0">
-                <a:latin typeface="Aptos" panose="020B0004020202020204" pitchFamily="34" charset="0"/>
-              </a:rPr>
-              <a:t> scales the </a:t>
-            </a:r>
-            <a:r>
-              <a:rPr lang="en-GB" dirty="0">
-                <a:latin typeface="Courier New" panose="02070309020205020404" pitchFamily="49" charset="0"/>
-                <a:cs typeface="Courier New" panose="02070309020205020404" pitchFamily="49" charset="0"/>
+                <a:latin typeface="Menlo" panose="020B0609030804020204" pitchFamily="49" charset="0"/>
+                <a:ea typeface="Menlo" panose="020B0609030804020204" pitchFamily="49" charset="0"/>
+                <a:cs typeface="Menlo" panose="020B0609030804020204" pitchFamily="49" charset="0"/>
               </a:rPr>
               <a:t>Text</a:t>
             </a:r>
@@ -9411,31 +9550,41 @@
             </a:pPr>
             <a:r>
               <a:rPr lang="en-GB" dirty="0">
-                <a:latin typeface="Courier" pitchFamily="2" charset="0"/>
+                <a:latin typeface="Menlo" panose="020B0609030804020204" pitchFamily="49" charset="0"/>
+                <a:ea typeface="Menlo" panose="020B0609030804020204" pitchFamily="49" charset="0"/>
+                <a:cs typeface="Menlo" panose="020B0609030804020204" pitchFamily="49" charset="0"/>
               </a:rPr>
               <a:t>Widget _example19() =&gt; </a:t>
             </a:r>
             <a:r>
               <a:rPr lang="en-GB" dirty="0" err="1">
-                <a:latin typeface="Courier" pitchFamily="2" charset="0"/>
+                <a:latin typeface="Menlo" panose="020B0609030804020204" pitchFamily="49" charset="0"/>
+                <a:ea typeface="Menlo" panose="020B0609030804020204" pitchFamily="49" charset="0"/>
+                <a:cs typeface="Menlo" panose="020B0609030804020204" pitchFamily="49" charset="0"/>
               </a:rPr>
               <a:t>const</a:t>
             </a:r>
             <a:r>
               <a:rPr lang="en-GB" dirty="0">
-                <a:latin typeface="Courier" pitchFamily="2" charset="0"/>
+                <a:latin typeface="Menlo" panose="020B0609030804020204" pitchFamily="49" charset="0"/>
+                <a:ea typeface="Menlo" panose="020B0609030804020204" pitchFamily="49" charset="0"/>
+                <a:cs typeface="Menlo" panose="020B0609030804020204" pitchFamily="49" charset="0"/>
               </a:rPr>
               <a:t> </a:t>
             </a:r>
             <a:r>
               <a:rPr lang="en-GB" dirty="0" err="1">
-                <a:latin typeface="Courier" pitchFamily="2" charset="0"/>
+                <a:latin typeface="Menlo" panose="020B0609030804020204" pitchFamily="49" charset="0"/>
+                <a:ea typeface="Menlo" panose="020B0609030804020204" pitchFamily="49" charset="0"/>
+                <a:cs typeface="Menlo" panose="020B0609030804020204" pitchFamily="49" charset="0"/>
               </a:rPr>
               <a:t>Center</a:t>
             </a:r>
             <a:r>
               <a:rPr lang="en-GB" dirty="0">
-                <a:latin typeface="Courier" pitchFamily="2" charset="0"/>
+                <a:latin typeface="Menlo" panose="020B0609030804020204" pitchFamily="49" charset="0"/>
+                <a:ea typeface="Menlo" panose="020B0609030804020204" pitchFamily="49" charset="0"/>
+                <a:cs typeface="Menlo" panose="020B0609030804020204" pitchFamily="49" charset="0"/>
               </a:rPr>
               <a:t>(</a:t>
             </a:r>
@@ -9446,19 +9595,25 @@
             </a:pPr>
             <a:r>
               <a:rPr lang="en-GB" dirty="0">
-                <a:latin typeface="Courier" pitchFamily="2" charset="0"/>
+                <a:latin typeface="Menlo" panose="020B0609030804020204" pitchFamily="49" charset="0"/>
+                <a:ea typeface="Menlo" panose="020B0609030804020204" pitchFamily="49" charset="0"/>
+                <a:cs typeface="Menlo" panose="020B0609030804020204" pitchFamily="49" charset="0"/>
               </a:rPr>
               <a:t>  child: </a:t>
             </a:r>
             <a:r>
               <a:rPr lang="en-GB" dirty="0" err="1">
-                <a:latin typeface="Courier" pitchFamily="2" charset="0"/>
+                <a:latin typeface="Menlo" panose="020B0609030804020204" pitchFamily="49" charset="0"/>
+                <a:ea typeface="Menlo" panose="020B0609030804020204" pitchFamily="49" charset="0"/>
+                <a:cs typeface="Menlo" panose="020B0609030804020204" pitchFamily="49" charset="0"/>
               </a:rPr>
               <a:t>FittedBox</a:t>
             </a:r>
             <a:r>
               <a:rPr lang="en-GB" dirty="0">
-                <a:latin typeface="Courier" pitchFamily="2" charset="0"/>
+                <a:latin typeface="Menlo" panose="020B0609030804020204" pitchFamily="49" charset="0"/>
+                <a:ea typeface="Menlo" panose="020B0609030804020204" pitchFamily="49" charset="0"/>
+                <a:cs typeface="Menlo" panose="020B0609030804020204" pitchFamily="49" charset="0"/>
               </a:rPr>
               <a:t>(</a:t>
             </a:r>
@@ -9469,7 +9624,9 @@
             </a:pPr>
             <a:r>
               <a:rPr lang="en-GB" dirty="0">
-                <a:latin typeface="Courier" pitchFamily="2" charset="0"/>
+                <a:latin typeface="Menlo" panose="020B0609030804020204" pitchFamily="49" charset="0"/>
+                <a:ea typeface="Menlo" panose="020B0609030804020204" pitchFamily="49" charset="0"/>
+                <a:cs typeface="Menlo" panose="020B0609030804020204" pitchFamily="49" charset="0"/>
               </a:rPr>
               <a:t>    child: Text('Some Example Text.'),</a:t>
             </a:r>
@@ -9480,7 +9637,9 @@
             </a:pPr>
             <a:r>
               <a:rPr lang="en-GB" dirty="0">
-                <a:latin typeface="Courier" pitchFamily="2" charset="0"/>
+                <a:latin typeface="Menlo" panose="020B0609030804020204" pitchFamily="49" charset="0"/>
+                <a:ea typeface="Menlo" panose="020B0609030804020204" pitchFamily="49" charset="0"/>
+                <a:cs typeface="Menlo" panose="020B0609030804020204" pitchFamily="49" charset="0"/>
               </a:rPr>
               <a:t>  ),</a:t>
             </a:r>
@@ -9491,11 +9650,12 @@
             </a:pPr>
             <a:r>
               <a:rPr lang="en-GB" dirty="0">
-                <a:latin typeface="Courier" pitchFamily="2" charset="0"/>
+                <a:latin typeface="Menlo" panose="020B0609030804020204" pitchFamily="49" charset="0"/>
+                <a:ea typeface="Menlo" panose="020B0609030804020204" pitchFamily="49" charset="0"/>
+                <a:cs typeface="Menlo" panose="020B0609030804020204" pitchFamily="49" charset="0"/>
               </a:rPr>
               <a:t>);</a:t>
             </a:r>
-            <a:endParaRPr lang="en-GB" dirty="0"/>
           </a:p>
           <a:p>
             <a:r>
@@ -9506,8 +9666,9 @@
             </a:r>
             <a:r>
               <a:rPr lang="en-GB" dirty="0" err="1">
-                <a:latin typeface="Courier New" panose="02070309020205020404" pitchFamily="49" charset="0"/>
-                <a:cs typeface="Courier New" panose="02070309020205020404" pitchFamily="49" charset="0"/>
+                <a:latin typeface="Menlo" panose="020B0609030804020204" pitchFamily="49" charset="0"/>
+                <a:ea typeface="Menlo" panose="020B0609030804020204" pitchFamily="49" charset="0"/>
+                <a:cs typeface="Menlo" panose="020B0609030804020204" pitchFamily="49" charset="0"/>
               </a:rPr>
               <a:t>FittedBox</a:t>
             </a:r>
@@ -9519,8 +9680,9 @@
             </a:r>
             <a:r>
               <a:rPr lang="en-GB" dirty="0" err="1">
-                <a:latin typeface="Courier New" panose="02070309020205020404" pitchFamily="49" charset="0"/>
-                <a:cs typeface="Courier New" panose="02070309020205020404" pitchFamily="49" charset="0"/>
+                <a:latin typeface="Menlo" panose="020B0609030804020204" pitchFamily="49" charset="0"/>
+                <a:ea typeface="Menlo" panose="020B0609030804020204" pitchFamily="49" charset="0"/>
+                <a:cs typeface="Menlo" panose="020B0609030804020204" pitchFamily="49" charset="0"/>
               </a:rPr>
               <a:t>Center</a:t>
             </a:r>
@@ -9532,8 +9694,9 @@
             </a:r>
             <a:r>
               <a:rPr lang="en-GB" dirty="0" err="1">
-                <a:latin typeface="Courier New" panose="02070309020205020404" pitchFamily="49" charset="0"/>
-                <a:cs typeface="Courier New" panose="02070309020205020404" pitchFamily="49" charset="0"/>
+                <a:latin typeface="Menlo" panose="020B0609030804020204" pitchFamily="49" charset="0"/>
+                <a:ea typeface="Menlo" panose="020B0609030804020204" pitchFamily="49" charset="0"/>
+                <a:cs typeface="Menlo" panose="020B0609030804020204" pitchFamily="49" charset="0"/>
               </a:rPr>
               <a:t>Center</a:t>
             </a:r>
@@ -9545,8 +9708,9 @@
             </a:r>
             <a:r>
               <a:rPr lang="en-GB" dirty="0" err="1">
-                <a:latin typeface="Courier New" panose="02070309020205020404" pitchFamily="49" charset="0"/>
-                <a:cs typeface="Courier New" panose="02070309020205020404" pitchFamily="49" charset="0"/>
+                <a:latin typeface="Menlo" panose="020B0609030804020204" pitchFamily="49" charset="0"/>
+                <a:ea typeface="Menlo" panose="020B0609030804020204" pitchFamily="49" charset="0"/>
+                <a:cs typeface="Menlo" panose="020B0609030804020204" pitchFamily="49" charset="0"/>
               </a:rPr>
               <a:t>FittedBox</a:t>
             </a:r>
@@ -9566,8 +9730,9 @@
             </a:r>
             <a:r>
               <a:rPr lang="en-GB" dirty="0" err="1">
-                <a:latin typeface="Courier New" panose="02070309020205020404" pitchFamily="49" charset="0"/>
-                <a:cs typeface="Courier New" panose="02070309020205020404" pitchFamily="49" charset="0"/>
+                <a:latin typeface="Menlo" panose="020B0609030804020204" pitchFamily="49" charset="0"/>
+                <a:ea typeface="Menlo" panose="020B0609030804020204" pitchFamily="49" charset="0"/>
+                <a:cs typeface="Menlo" panose="020B0609030804020204" pitchFamily="49" charset="0"/>
               </a:rPr>
               <a:t>FittedBox</a:t>
             </a:r>
@@ -9579,8 +9744,9 @@
             </a:r>
             <a:r>
               <a:rPr lang="en-GB" dirty="0">
-                <a:latin typeface="Courier New" panose="02070309020205020404" pitchFamily="49" charset="0"/>
-                <a:cs typeface="Courier New" panose="02070309020205020404" pitchFamily="49" charset="0"/>
+                <a:latin typeface="Menlo" panose="020B0609030804020204" pitchFamily="49" charset="0"/>
+                <a:ea typeface="Menlo" panose="020B0609030804020204" pitchFamily="49" charset="0"/>
+                <a:cs typeface="Menlo" panose="020B0609030804020204" pitchFamily="49" charset="0"/>
               </a:rPr>
               <a:t>Text</a:t>
             </a:r>
@@ -9592,8 +9758,9 @@
             </a:r>
             <a:r>
               <a:rPr lang="en-GB" dirty="0">
-                <a:latin typeface="Courier New" panose="02070309020205020404" pitchFamily="49" charset="0"/>
-                <a:cs typeface="Courier New" panose="02070309020205020404" pitchFamily="49" charset="0"/>
+                <a:latin typeface="Menlo" panose="020B0609030804020204" pitchFamily="49" charset="0"/>
+                <a:ea typeface="Menlo" panose="020B0609030804020204" pitchFamily="49" charset="0"/>
+                <a:cs typeface="Menlo" panose="020B0609030804020204" pitchFamily="49" charset="0"/>
               </a:rPr>
               <a:t>Text</a:t>
             </a:r>
@@ -9605,8 +9772,9 @@
             </a:r>
             <a:r>
               <a:rPr lang="en-GB" dirty="0" err="1">
-                <a:latin typeface="Courier New" panose="02070309020205020404" pitchFamily="49" charset="0"/>
-                <a:cs typeface="Courier New" panose="02070309020205020404" pitchFamily="49" charset="0"/>
+                <a:latin typeface="Menlo" panose="020B0609030804020204" pitchFamily="49" charset="0"/>
+                <a:ea typeface="Menlo" panose="020B0609030804020204" pitchFamily="49" charset="0"/>
+                <a:cs typeface="Menlo" panose="020B0609030804020204" pitchFamily="49" charset="0"/>
               </a:rPr>
               <a:t>FittedBox</a:t>
             </a:r>
@@ -9618,8 +9786,9 @@
             </a:r>
             <a:r>
               <a:rPr lang="en-GB" dirty="0">
-                <a:latin typeface="Courier New" panose="02070309020205020404" pitchFamily="49" charset="0"/>
-                <a:cs typeface="Courier New" panose="02070309020205020404" pitchFamily="49" charset="0"/>
+                <a:latin typeface="Menlo" panose="020B0609030804020204" pitchFamily="49" charset="0"/>
+                <a:ea typeface="Menlo" panose="020B0609030804020204" pitchFamily="49" charset="0"/>
+                <a:cs typeface="Menlo" panose="020B0609030804020204" pitchFamily="49" charset="0"/>
               </a:rPr>
               <a:t>Text</a:t>
             </a:r>
@@ -10445,7 +10614,7 @@
           <a:p>
             <a:r>
               <a:rPr lang="en-GB" dirty="0"/>
-              <a:t>Exercise 05.01</a:t>
+              <a:t>Exercise 01</a:t>
             </a:r>
           </a:p>
           <a:p>
@@ -10488,20 +10657,40 @@
               <a:t>Hint: I used the following widgets: </a:t>
             </a:r>
             <a:r>
-              <a:rPr lang="en-US" dirty="0" err="1"/>
+              <a:rPr lang="en-US" dirty="0" err="1">
+                <a:latin typeface="Menlo" panose="020B0609030804020204" pitchFamily="49" charset="0"/>
+                <a:ea typeface="Menlo" panose="020B0609030804020204" pitchFamily="49" charset="0"/>
+                <a:cs typeface="Menlo" panose="020B0609030804020204" pitchFamily="49" charset="0"/>
+              </a:rPr>
               <a:t>AppBar</a:t>
             </a:r>
             <a:r>
+              <a:rPr lang="en-US" dirty="0">
+                <a:latin typeface="Menlo" panose="020B0609030804020204" pitchFamily="49" charset="0"/>
+                <a:ea typeface="Menlo" panose="020B0609030804020204" pitchFamily="49" charset="0"/>
+                <a:cs typeface="Menlo" panose="020B0609030804020204" pitchFamily="49" charset="0"/>
+              </a:rPr>
+              <a:t>, Text, Container, Icon, </a:t>
+            </a:r>
+            <a:r>
+              <a:rPr lang="en-US" dirty="0" err="1">
+                <a:latin typeface="Menlo" panose="020B0609030804020204" pitchFamily="49" charset="0"/>
+                <a:ea typeface="Menlo" panose="020B0609030804020204" pitchFamily="49" charset="0"/>
+                <a:cs typeface="Menlo" panose="020B0609030804020204" pitchFamily="49" charset="0"/>
+              </a:rPr>
+              <a:t>SizedBox</a:t>
+            </a:r>
+            <a:r>
+              <a:rPr lang="en-US" dirty="0">
+                <a:latin typeface="Menlo" panose="020B0609030804020204" pitchFamily="49" charset="0"/>
+                <a:ea typeface="Menlo" panose="020B0609030804020204" pitchFamily="49" charset="0"/>
+                <a:cs typeface="Menlo" panose="020B0609030804020204" pitchFamily="49" charset="0"/>
+              </a:rPr>
+              <a:t>, Column, Row, Colors</a:t>
+            </a:r>
+            <a:r>
               <a:rPr lang="en-US" dirty="0"/>
-              <a:t>, Text, Container, Icon, </a:t>
-            </a:r>
-            <a:r>
-              <a:rPr lang="en-US" dirty="0" err="1"/>
-              <a:t>SizedBox</a:t>
-            </a:r>
-            <a:r>
-              <a:rPr lang="en-US" dirty="0"/>
-              <a:t>, Column, Row, Colors, and some others…</a:t>
+              <a:t>, and some others…</a:t>
             </a:r>
             <a:endParaRPr lang="en-GB" dirty="0"/>
           </a:p>
@@ -10660,7 +10849,7 @@
           <a:p>
             <a:r>
               <a:rPr lang="en-GB" dirty="0"/>
-              <a:t>Exercise 05.02</a:t>
+              <a:t>Exercise 02</a:t>
             </a:r>
           </a:p>
           <a:p>
@@ -10727,7 +10916,11 @@
               <a:t>Modify the </a:t>
             </a:r>
             <a:r>
-              <a:rPr lang="en-GB" dirty="0" err="1"/>
+              <a:rPr lang="en-GB" dirty="0" err="1">
+                <a:latin typeface="Menlo" panose="020B0609030804020204" pitchFamily="49" charset="0"/>
+                <a:ea typeface="Menlo" panose="020B0609030804020204" pitchFamily="49" charset="0"/>
+                <a:cs typeface="Menlo" panose="020B0609030804020204" pitchFamily="49" charset="0"/>
+              </a:rPr>
               <a:t>ListView</a:t>
             </a:r>
             <a:r>
@@ -10895,7 +11088,7 @@
           <a:p>
             <a:r>
               <a:rPr lang="en-GB" dirty="0"/>
-              <a:t>Exercise 05.03</a:t>
+              <a:t>Exercise 03</a:t>
             </a:r>
           </a:p>
           <a:p>
@@ -10932,15 +11125,19 @@
             <a:pPr lvl="1"/>
             <a:r>
               <a:rPr lang="en-US" dirty="0"/>
-              <a:t>Starting from the code of exercise 05.02, modify each </a:t>
-            </a:r>
-            <a:r>
-              <a:rPr lang="en-US" dirty="0" err="1"/>
+              <a:t>Starting from the code of exercise 02, modify each </a:t>
+            </a:r>
+            <a:r>
+              <a:rPr lang="en-US" dirty="0" err="1">
+                <a:latin typeface="Menlo" panose="020B0609030804020204" pitchFamily="49" charset="0"/>
+                <a:ea typeface="Menlo" panose="020B0609030804020204" pitchFamily="49" charset="0"/>
+                <a:cs typeface="Menlo" panose="020B0609030804020204" pitchFamily="49" charset="0"/>
+              </a:rPr>
               <a:t>ListTile</a:t>
             </a:r>
             <a:r>
               <a:rPr lang="en-US" dirty="0"/>
-              <a:t> in order to have as a title a random word in uppercase generated using the </a:t>
+              <a:t> in order to show as title, every time you restart the app, a random word in uppercase generated using the </a:t>
             </a:r>
             <a:r>
               <a:rPr lang="en-US" dirty="0" err="1"/>
@@ -11941,7 +12138,9 @@
             <a:pPr algn="ctr"/>
             <a:r>
               <a:rPr lang="en-IT" dirty="0">
-                <a:latin typeface="Courier" pitchFamily="2" charset="0"/>
+                <a:latin typeface="Menlo" panose="020B0609030804020204" pitchFamily="49" charset="0"/>
+                <a:ea typeface="Menlo" panose="020B0609030804020204" pitchFamily="49" charset="0"/>
+                <a:cs typeface="Menlo" panose="020B0609030804020204" pitchFamily="49" charset="0"/>
               </a:rPr>
               <a:t>Text</a:t>
             </a:r>
@@ -11991,7 +12190,9 @@
             <a:pPr algn="ctr"/>
             <a:r>
               <a:rPr lang="en-IT" dirty="0">
-                <a:latin typeface="Courier" pitchFamily="2" charset="0"/>
+                <a:latin typeface="Menlo" panose="020B0609030804020204" pitchFamily="49" charset="0"/>
+                <a:ea typeface="Menlo" panose="020B0609030804020204" pitchFamily="49" charset="0"/>
+                <a:cs typeface="Menlo" panose="020B0609030804020204" pitchFamily="49" charset="0"/>
               </a:rPr>
               <a:t>Scaffold</a:t>
             </a:r>
@@ -12041,7 +12242,9 @@
             <a:pPr algn="ctr"/>
             <a:r>
               <a:rPr lang="en-IT" dirty="0">
-                <a:latin typeface="Courier" pitchFamily="2" charset="0"/>
+                <a:latin typeface="Menlo" panose="020B0609030804020204" pitchFamily="49" charset="0"/>
+                <a:ea typeface="Menlo" panose="020B0609030804020204" pitchFamily="49" charset="0"/>
+                <a:cs typeface="Menlo" panose="020B0609030804020204" pitchFamily="49" charset="0"/>
               </a:rPr>
               <a:t>AppBar</a:t>
             </a:r>
@@ -12091,7 +12294,9 @@
             <a:pPr algn="ctr"/>
             <a:r>
               <a:rPr lang="en-IT" dirty="0">
-                <a:latin typeface="Courier" pitchFamily="2" charset="0"/>
+                <a:latin typeface="Menlo" panose="020B0609030804020204" pitchFamily="49" charset="0"/>
+                <a:ea typeface="Menlo" panose="020B0609030804020204" pitchFamily="49" charset="0"/>
+                <a:cs typeface="Menlo" panose="020B0609030804020204" pitchFamily="49" charset="0"/>
               </a:rPr>
               <a:t>Center</a:t>
             </a:r>
@@ -12141,7 +12346,9 @@
             <a:pPr algn="ctr"/>
             <a:r>
               <a:rPr lang="en-IT" sz="1400" dirty="0">
-                <a:latin typeface="Courier" pitchFamily="2" charset="0"/>
+                <a:latin typeface="Menlo" panose="020B0609030804020204" pitchFamily="49" charset="0"/>
+                <a:ea typeface="Menlo" panose="020B0609030804020204" pitchFamily="49" charset="0"/>
+                <a:cs typeface="Menlo" panose="020B0609030804020204" pitchFamily="49" charset="0"/>
               </a:rPr>
               <a:t>...</a:t>
             </a:r>
@@ -12406,7 +12613,9 @@
             <a:pPr algn="ctr"/>
             <a:r>
               <a:rPr lang="en-IT" dirty="0">
-                <a:latin typeface="Courier" pitchFamily="2" charset="0"/>
+                <a:latin typeface="Menlo" panose="020B0609030804020204" pitchFamily="49" charset="0"/>
+                <a:ea typeface="Menlo" panose="020B0609030804020204" pitchFamily="49" charset="0"/>
+                <a:cs typeface="Menlo" panose="020B0609030804020204" pitchFamily="49" charset="0"/>
               </a:rPr>
               <a:t>Column</a:t>
             </a:r>
@@ -12456,7 +12665,9 @@
             <a:pPr algn="ctr"/>
             <a:r>
               <a:rPr lang="en-IT" sz="1100" dirty="0">
-                <a:latin typeface="Courier" pitchFamily="2" charset="0"/>
+                <a:latin typeface="Menlo" panose="020B0609030804020204" pitchFamily="49" charset="0"/>
+                <a:ea typeface="Menlo" panose="020B0609030804020204" pitchFamily="49" charset="0"/>
+                <a:cs typeface="Menlo" panose="020B0609030804020204" pitchFamily="49" charset="0"/>
               </a:rPr>
               <a:t>ElevatedButton</a:t>
             </a:r>
@@ -12506,7 +12717,9 @@
             <a:pPr algn="ctr"/>
             <a:r>
               <a:rPr lang="en-IT" dirty="0">
-                <a:latin typeface="Courier" pitchFamily="2" charset="0"/>
+                <a:latin typeface="Menlo" panose="020B0609030804020204" pitchFamily="49" charset="0"/>
+                <a:ea typeface="Menlo" panose="020B0609030804020204" pitchFamily="49" charset="0"/>
+                <a:cs typeface="Menlo" panose="020B0609030804020204" pitchFamily="49" charset="0"/>
               </a:rPr>
               <a:t>Text</a:t>
             </a:r>
@@ -12556,7 +12769,9 @@
             <a:pPr algn="ctr"/>
             <a:r>
               <a:rPr lang="en-IT" dirty="0">
-                <a:latin typeface="Courier" pitchFamily="2" charset="0"/>
+                <a:latin typeface="Menlo" panose="020B0609030804020204" pitchFamily="49" charset="0"/>
+                <a:ea typeface="Menlo" panose="020B0609030804020204" pitchFamily="49" charset="0"/>
+                <a:cs typeface="Menlo" panose="020B0609030804020204" pitchFamily="49" charset="0"/>
               </a:rPr>
               <a:t>Text</a:t>
             </a:r>
@@ -12606,7 +12821,9 @@
             <a:pPr algn="ctr"/>
             <a:r>
               <a:rPr lang="en-IT" sz="900" dirty="0">
-                <a:latin typeface="Courier" pitchFamily="2" charset="0"/>
+                <a:latin typeface="Menlo" panose="020B0609030804020204" pitchFamily="49" charset="0"/>
+                <a:ea typeface="Menlo" panose="020B0609030804020204" pitchFamily="49" charset="0"/>
+                <a:cs typeface="Menlo" panose="020B0609030804020204" pitchFamily="49" charset="0"/>
               </a:rPr>
               <a:t>MainAxisAlignment</a:t>
             </a:r>
